--- a/Slides/Mod01/Mod-01-intro.pptx
+++ b/Slides/Mod01/Mod-01-intro.pptx
@@ -1825,7 +1825,7 @@
           <a:p>
             <a:fld id="{27E65FE3-F39A-4FC1-A134-D55872A714C4}" type="datetime1">
               <a:rPr lang="en-US" smtClean="0"/>
-              <a:t>2/25/2026</a:t>
+              <a:t>3/8/2026</a:t>
             </a:fld>
             <a:endParaRPr lang="en-US"/>
           </a:p>
@@ -2298,7 +2298,7 @@
           <a:p>
             <a:fld id="{F92AD9DF-DB58-4424-B183-AACA680B9DD1}" type="datetime1">
               <a:rPr lang="en-US" smtClean="0"/>
-              <a:t>2/25/2026</a:t>
+              <a:t>3/8/2026</a:t>
             </a:fld>
             <a:endParaRPr lang="en-US" dirty="0"/>
           </a:p>
@@ -2802,7 +2802,7 @@
           <a:p>
             <a:fld id="{422965C9-543D-431C-B847-0F5CFF32AC2B}" type="datetime1">
               <a:rPr lang="en-US" smtClean="0"/>
-              <a:t>2/25/2026</a:t>
+              <a:t>3/8/2026</a:t>
             </a:fld>
             <a:endParaRPr lang="en-US" dirty="0"/>
           </a:p>
@@ -3241,7 +3241,7 @@
           <a:p>
             <a:fld id="{57E5A575-5E82-4CCC-864E-34B7DD910810}" type="datetime1">
               <a:rPr lang="en-US" smtClean="0"/>
-              <a:t>2/25/2026</a:t>
+              <a:t>3/8/2026</a:t>
             </a:fld>
             <a:endParaRPr lang="en-US"/>
           </a:p>
@@ -3947,7 +3947,7 @@
           <a:p>
             <a:fld id="{F92AD9DF-DB58-4424-B183-AACA680B9DD1}" type="datetime1">
               <a:rPr lang="en-US" smtClean="0"/>
-              <a:t>2/25/2026</a:t>
+              <a:t>3/8/2026</a:t>
             </a:fld>
             <a:endParaRPr lang="en-US" dirty="0"/>
           </a:p>
@@ -4666,7 +4666,7 @@
           <a:p>
             <a:fld id="{F92AD9DF-DB58-4424-B183-AACA680B9DD1}" type="datetime1">
               <a:rPr lang="en-US" smtClean="0"/>
-              <a:t>2/25/2026</a:t>
+              <a:t>3/8/2026</a:t>
             </a:fld>
             <a:endParaRPr lang="en-US" dirty="0"/>
           </a:p>
@@ -5282,7 +5282,7 @@
           <a:p>
             <a:fld id="{F92AD9DF-DB58-4424-B183-AACA680B9DD1}" type="datetime1">
               <a:rPr lang="en-US" smtClean="0"/>
-              <a:t>2/25/2026</a:t>
+              <a:t>3/8/2026</a:t>
             </a:fld>
             <a:endParaRPr lang="en-US" dirty="0"/>
           </a:p>
@@ -5631,7 +5631,7 @@
           <a:p>
             <a:fld id="{F92AD9DF-DB58-4424-B183-AACA680B9DD1}" type="datetime1">
               <a:rPr lang="en-US" smtClean="0"/>
-              <a:t>2/25/2026</a:t>
+              <a:t>3/8/2026</a:t>
             </a:fld>
             <a:endParaRPr lang="en-US" dirty="0"/>
           </a:p>
@@ -6295,7 +6295,7 @@
           <a:p>
             <a:fld id="{F92AD9DF-DB58-4424-B183-AACA680B9DD1}" type="datetime1">
               <a:rPr lang="en-US" smtClean="0"/>
-              <a:t>2/25/2026</a:t>
+              <a:t>3/8/2026</a:t>
             </a:fld>
             <a:endParaRPr lang="en-US" dirty="0"/>
           </a:p>
@@ -6489,7 +6489,7 @@
           <a:p>
             <a:fld id="{F92AD9DF-DB58-4424-B183-AACA680B9DD1}" type="datetime1">
               <a:rPr lang="en-US" smtClean="0"/>
-              <a:t>2/25/2026</a:t>
+              <a:t>3/8/2026</a:t>
             </a:fld>
             <a:endParaRPr lang="en-US" dirty="0"/>
           </a:p>
@@ -7622,7 +7622,7 @@
           <a:p>
             <a:fld id="{F977A924-4133-4BF1-B013-2602D540E680}" type="datetime1">
               <a:rPr lang="en-US" smtClean="0"/>
-              <a:t>2/25/2026</a:t>
+              <a:t>3/8/2026</a:t>
             </a:fld>
             <a:endParaRPr lang="en-US" dirty="0"/>
           </a:p>
@@ -8484,7 +8484,7 @@
           <a:p>
             <a:fld id="{F92AD9DF-DB58-4424-B183-AACA680B9DD1}" type="datetime1">
               <a:rPr lang="en-US" smtClean="0"/>
-              <a:t>2/25/2026</a:t>
+              <a:t>3/8/2026</a:t>
             </a:fld>
             <a:endParaRPr lang="en-US" dirty="0"/>
           </a:p>
@@ -8768,7 +8768,7 @@
           <a:p>
             <a:fld id="{F92AD9DF-DB58-4424-B183-AACA680B9DD1}" type="datetime1">
               <a:rPr lang="en-US" smtClean="0"/>
-              <a:t>2/25/2026</a:t>
+              <a:t>3/8/2026</a:t>
             </a:fld>
             <a:endParaRPr lang="en-US" dirty="0"/>
           </a:p>
@@ -8910,7 +8910,7 @@
           <a:p>
             <a:fld id="{F92AD9DF-DB58-4424-B183-AACA680B9DD1}" type="datetime1">
               <a:rPr lang="en-US" smtClean="0"/>
-              <a:t>2/25/2026</a:t>
+              <a:t>3/8/2026</a:t>
             </a:fld>
             <a:endParaRPr lang="en-US" dirty="0"/>
           </a:p>
@@ -9944,7 +9944,7 @@
           <a:p>
             <a:fld id="{F977A924-4133-4BF1-B013-2602D540E680}" type="datetime1">
               <a:rPr lang="en-US" smtClean="0"/>
-              <a:t>2/25/2026</a:t>
+              <a:t>3/8/2026</a:t>
             </a:fld>
             <a:endParaRPr lang="en-US" dirty="0"/>
           </a:p>
@@ -10333,7 +10333,7 @@
           <a:p>
             <a:fld id="{F92AD9DF-DB58-4424-B183-AACA680B9DD1}" type="datetime1">
               <a:rPr lang="en-US" smtClean="0"/>
-              <a:t>2/25/2026</a:t>
+              <a:t>3/8/2026</a:t>
             </a:fld>
             <a:endParaRPr lang="en-US" dirty="0"/>
           </a:p>
@@ -10644,7 +10644,7 @@
           <a:p>
             <a:fld id="{F92AD9DF-DB58-4424-B183-AACA680B9DD1}" type="datetime1">
               <a:rPr lang="en-US" smtClean="0"/>
-              <a:t>2/25/2026</a:t>
+              <a:t>3/8/2026</a:t>
             </a:fld>
             <a:endParaRPr lang="en-US" dirty="0"/>
           </a:p>
@@ -11023,7 +11023,7 @@
           <a:p>
             <a:fld id="{F92AD9DF-DB58-4424-B183-AACA680B9DD1}" type="datetime1">
               <a:rPr lang="en-US" smtClean="0"/>
-              <a:t>2/25/2026</a:t>
+              <a:t>3/8/2026</a:t>
             </a:fld>
             <a:endParaRPr lang="en-US" dirty="0"/>
           </a:p>
@@ -11420,7 +11420,7 @@
           <a:p>
             <a:fld id="{F92AD9DF-DB58-4424-B183-AACA680B9DD1}" type="datetime1">
               <a:rPr lang="en-US" smtClean="0"/>
-              <a:t>2/25/2026</a:t>
+              <a:t>3/8/2026</a:t>
             </a:fld>
             <a:endParaRPr lang="en-US" dirty="0"/>
           </a:p>
@@ -11570,7 +11570,7 @@
           <a:p>
             <a:fld id="{F92AD9DF-DB58-4424-B183-AACA680B9DD1}" type="datetime1">
               <a:rPr lang="en-US" smtClean="0"/>
-              <a:t>2/25/2026</a:t>
+              <a:t>3/8/2026</a:t>
             </a:fld>
             <a:endParaRPr lang="en-US" dirty="0"/>
           </a:p>
@@ -14072,7 +14072,7 @@
           <a:p>
             <a:fld id="{F92AD9DF-DB58-4424-B183-AACA680B9DD1}" type="datetime1">
               <a:rPr lang="en-US" smtClean="0"/>
-              <a:t>2/25/2026</a:t>
+              <a:t>3/8/2026</a:t>
             </a:fld>
             <a:endParaRPr lang="en-US" dirty="0"/>
           </a:p>
@@ -15517,7 +15517,7 @@
           <a:p>
             <a:fld id="{F92AD9DF-DB58-4424-B183-AACA680B9DD1}" type="datetime1">
               <a:rPr lang="en-US" smtClean="0"/>
-              <a:t>2/25/2026</a:t>
+              <a:t>3/8/2026</a:t>
             </a:fld>
             <a:endParaRPr lang="en-US" dirty="0"/>
           </a:p>
@@ -17020,7 +17020,7 @@
           <a:p>
             <a:fld id="{F92AD9DF-DB58-4424-B183-AACA680B9DD1}" type="datetime1">
               <a:rPr lang="en-US" smtClean="0"/>
-              <a:t>2/25/2026</a:t>
+              <a:t>3/8/2026</a:t>
             </a:fld>
             <a:endParaRPr lang="en-US" dirty="0"/>
           </a:p>
@@ -17536,7 +17536,7 @@
           <a:p>
             <a:fld id="{F92AD9DF-DB58-4424-B183-AACA680B9DD1}" type="datetime1">
               <a:rPr lang="en-US" smtClean="0"/>
-              <a:t>2/25/2026</a:t>
+              <a:t>3/8/2026</a:t>
             </a:fld>
             <a:endParaRPr lang="en-US" dirty="0"/>
           </a:p>
@@ -17750,7 +17750,7 @@
           <a:p>
             <a:fld id="{F977A924-4133-4BF1-B013-2602D540E680}" type="datetime1">
               <a:rPr lang="en-US" smtClean="0"/>
-              <a:t>2/25/2026</a:t>
+              <a:t>3/8/2026</a:t>
             </a:fld>
             <a:endParaRPr lang="en-US" dirty="0"/>
           </a:p>
@@ -18204,7 +18204,7 @@
           <a:p>
             <a:fld id="{F92AD9DF-DB58-4424-B183-AACA680B9DD1}" type="datetime1">
               <a:rPr lang="en-US" smtClean="0"/>
-              <a:t>2/25/2026</a:t>
+              <a:t>3/8/2026</a:t>
             </a:fld>
             <a:endParaRPr lang="en-US" dirty="0"/>
           </a:p>
@@ -18505,13 +18505,34 @@
           <a:bodyPr/>
           <a:lstStyle/>
           <a:p>
+            <a:pPr marL="0" indent="0">
+              <a:buNone/>
+            </a:pPr>
             <a:r>
               <a:rPr lang="en-US" b="1" dirty="0"/>
               <a:t>Problem Solved:</a:t>
             </a:r>
             <a:r>
               <a:rPr lang="en-US" dirty="0"/>
-              <a:t> Labor shortage in manufacturing — replacing dangerous, repetitive physical tasks (parts sorting, assembly) that humans find hazardous or tedious.</a:t>
+              <a:t> </a:t>
+            </a:r>
+          </a:p>
+          <a:p>
+            <a:r>
+              <a:rPr lang="en-US" dirty="0"/>
+              <a:t>Labor shortage in manufacturing </a:t>
+            </a:r>
+          </a:p>
+          <a:p>
+            <a:r>
+              <a:rPr lang="en-US" dirty="0"/>
+              <a:t>replacing dangerous, </a:t>
+            </a:r>
+          </a:p>
+          <a:p>
+            <a:r>
+              <a:rPr lang="en-US" dirty="0"/>
+              <a:t>repetitive physical tasks (parts sorting, assembly) that humans find hazardous or tedious.</a:t>
             </a:r>
           </a:p>
         </p:txBody>
@@ -18539,7 +18560,7 @@
           <a:p>
             <a:fld id="{F92AD9DF-DB58-4424-B183-AACA680B9DD1}" type="datetime1">
               <a:rPr lang="en-US" smtClean="0"/>
-              <a:t>2/25/2026</a:t>
+              <a:t>3/8/2026</a:t>
             </a:fld>
             <a:endParaRPr lang="en-US" dirty="0"/>
           </a:p>
@@ -18791,7 +18812,7 @@
           <a:p>
             <a:fld id="{F92AD9DF-DB58-4424-B183-AACA680B9DD1}" type="datetime1">
               <a:rPr lang="en-US" smtClean="0"/>
-              <a:t>2/25/2026</a:t>
+              <a:t>3/8/2026</a:t>
             </a:fld>
             <a:endParaRPr lang="en-US" dirty="0"/>
           </a:p>
@@ -19095,7 +19116,7 @@
           <a:p>
             <a:fld id="{F92AD9DF-DB58-4424-B183-AACA680B9DD1}" type="datetime1">
               <a:rPr lang="en-US" smtClean="0"/>
-              <a:t>2/25/2026</a:t>
+              <a:t>3/8/2026</a:t>
             </a:fld>
             <a:endParaRPr lang="en-US" dirty="0"/>
           </a:p>
@@ -19439,7 +19460,7 @@
           <a:p>
             <a:fld id="{F92AD9DF-DB58-4424-B183-AACA680B9DD1}" type="datetime1">
               <a:rPr lang="en-US" smtClean="0"/>
-              <a:t>2/25/2026</a:t>
+              <a:t>3/8/2026</a:t>
             </a:fld>
             <a:endParaRPr lang="en-US" dirty="0"/>
           </a:p>
@@ -19694,7 +19715,7 @@
           <a:p>
             <a:fld id="{F92AD9DF-DB58-4424-B183-AACA680B9DD1}" type="datetime1">
               <a:rPr lang="en-US" smtClean="0"/>
-              <a:t>2/25/2026</a:t>
+              <a:t>3/8/2026</a:t>
             </a:fld>
             <a:endParaRPr lang="en-US" dirty="0"/>
           </a:p>
@@ -19943,7 +19964,7 @@
             </p:seq>
             <p:video>
               <p:cMediaNode vol="80000">
-                <p:cTn id="7" fill="hold" display="0">
+                <p:cTn id="7" repeatCount="indefinite" fill="hold" display="0">
                   <p:stCondLst>
                     <p:cond delay="indefinite"/>
                   </p:stCondLst>
